--- a/catalog/samples/matrix_2x2.pptx
+++ b/catalog/samples/matrix_2x2.pptx
@@ -1172,7 +1172,7 @@
           </a:p>
           <a:p>
             <a:r>
-              <a:t>  "template_sha256": "3e1e5f57db26494fe2cd189aa07ff1c3b6658cb402afeb79f65152ce80f44ff2"</a:t>
+              <a:t>  "template_sha256": "fb9c3ec422df6d9c45d6655b5f1cfdfe31dccc09dec4774a543a84d70935a975"</a:t>
             </a:r>
           </a:p>
           <a:p>
